--- a/public/fun/pack/pptx/talkpro/발표템플릿프리미엄_40_연말결산·회고_모노블랙.pptx
+++ b/public/fun/pack/pptx/talkpro/발표템플릿프리미엄_40_연말결산·회고_모노블랙.pptx
@@ -115,12 +115,12 @@
   <p:extLst>
     <p:ext uri="{521415D9-36F7-43E2-AB2F-B90AF26B5E84}">
       <p14:sectionLst xmlns:p14="http://schemas.microsoft.com/office/powerpoint/2010/main">
-        <p14:section name="시작" id="{0A8300D5-C409-4062-B3A0-BE58A5911A94}">
+        <p14:section name="시작" id="{2941412F-44FA-44E2-9E43-50ADD4D7FDD5}">
           <p14:sldIdLst>
             <p14:sldId id="256"/>
           </p14:sldIdLst>
         </p14:section>
-        <p14:section name="본문" id="{E5DF0181-CC4F-41CA-8609-A521DBA07FF3}">
+        <p14:section name="본문" id="{8897716A-4A95-432B-A214-AFD0CDB950E1}">
           <p14:sldIdLst>
             <p14:sldId id="257"/>
             <p14:sldId id="258"/>
@@ -131,7 +131,7 @@
             <p14:sldId id="263"/>
           </p14:sldIdLst>
         </p14:section>
-        <p14:section name="마무리" id="{DBBAA36D-531A-4810-ACE3-51EB4939D98A}">
+        <p14:section name="마무리" id="{B1B8ED08-B403-4E80-A189-23818472F63A}">
           <p14:sldIdLst>
             <p14:sldId id="264"/>
           </p14:sldIdLst>
@@ -1938,7 +1938,7 @@
             </a:lvl1pPr>
           </a:lstStyle>
           <a:p>
-            <a:fld id="{DF9CB0D9-3AAC-48BF-9AB1-ED5BF964E716}" type="slidenum">
+            <a:fld id="{32102562-C670-4D44-AC54-4FB4F8FB3FD9}" type="slidenum">
               <a:rPr lang="en-US"/>
               <a:t>‹#›</a:t>
             </a:fld>
@@ -2572,7 +2572,7 @@
             </a:lvl1pPr>
           </a:lstStyle>
           <a:p>
-            <a:fld id="{DE88E643-3B52-41E6-A146-DB6176ED3A22}" type="slidenum">
+            <a:fld id="{6461AE48-09FA-48E7-AB02-E6A74ECDCC53}" type="slidenum">
               <a:rPr lang="en-US"/>
               <a:t>‹#›</a:t>
             </a:fld>
@@ -3161,7 +3161,7 @@
             </a:lvl1pPr>
           </a:lstStyle>
           <a:p>
-            <a:fld id="{28D411B9-C230-4803-BB0D-681417C10727}" type="slidenum">
+            <a:fld id="{99AD417A-E4FC-44DD-9841-555300D8DDC8}" type="slidenum">
               <a:rPr lang="en-US"/>
               <a:t>‹#›</a:t>
             </a:fld>
@@ -3992,7 +3992,7 @@
           <a:p>
             <a:r>
               <a:rPr lang="ko-KR"/>
-              <a:t>0000. 00. 00</a:t>
+              <a:t>날짜 입력</a:t>
             </a:r>
           </a:p>
         </p:txBody>
@@ -4077,7 +4077,7 @@
           <a:bodyPr/>
           <a:lstStyle/>
           <a:p>
-            <a:fld id="{BAB3763F-448E-4700-8240-6FD0561371FA}" type="slidenum">
+            <a:fld id="{12930F95-5E10-4A7B-A0A2-7813E35EE122}" type="slidenum">
               <a:rPr lang="en-US"/>
               <a:t>‹#›</a:t>
             </a:fld>
@@ -5179,7 +5179,7 @@
           <a:bodyPr/>
           <a:lstStyle/>
           <a:p>
-            <a:fld id="{5CBC6B1D-F4CC-4F93-9AB7-481E36428379}" type="slidenum">
+            <a:fld id="{4F55FBE1-7152-43AA-B205-F4A3E6BC765F}" type="slidenum">
               <a:rPr lang="en-US"/>
               <a:t>‹#›</a:t>
             </a:fld>
@@ -5267,7 +5267,7 @@
           <a:bodyPr/>
           <a:lstStyle/>
           <a:p>
-            <a:fld id="{18A8B085-EEA6-4A6C-8B65-AAB89B9A62D8}" type="slidenum">
+            <a:fld id="{DB8B4F40-D4D0-4BA0-8A94-5F66501C96BB}" type="slidenum">
               <a:rPr lang="en-US"/>
               <a:t>‹#›</a:t>
             </a:fld>
@@ -6165,7 +6165,7 @@
           <a:bodyPr/>
           <a:lstStyle/>
           <a:p>
-            <a:fld id="{699CFA9D-9609-4A23-AA62-7D493478DB73}" type="slidenum">
+            <a:fld id="{1E2EEA2F-46FE-4116-9FC8-650CA52D5AF7}" type="slidenum">
               <a:rPr lang="en-US"/>
               <a:t>‹#›</a:t>
             </a:fld>
@@ -6763,7 +6763,7 @@
           <a:bodyPr/>
           <a:lstStyle/>
           <a:p>
-            <a:fld id="{E6F799C0-6EA9-4CC7-8C18-6D99BF9ADAA3}" type="slidenum">
+            <a:fld id="{5A6E17AB-1CFB-4923-A71E-D8F8F92F70D2}" type="slidenum">
               <a:rPr lang="en-US"/>
               <a:t>‹#›</a:t>
             </a:fld>
@@ -6946,7 +6946,7 @@
           <a:bodyPr/>
           <a:lstStyle/>
           <a:p>
-            <a:fld id="{6ED9F316-77E8-4A53-A6DC-43ECC10DA99D}" type="slidenum">
+            <a:fld id="{3B1B3440-DD3A-4DBD-921E-B58533C2178A}" type="slidenum">
               <a:rPr lang="en-US"/>
               <a:t>‹#›</a:t>
             </a:fld>
@@ -8010,7 +8010,7 @@
           <a:bodyPr/>
           <a:lstStyle/>
           <a:p>
-            <a:fld id="{40B17653-0462-469D-90DC-1A66A104A5EA}" type="slidenum">
+            <a:fld id="{2D7FCFBB-54B8-4169-84C2-3CBF49D68652}" type="slidenum">
               <a:rPr lang="en-US"/>
               <a:t>‹#›</a:t>
             </a:fld>
